--- a/output/Vortrag_Weichenantriebe.pptx
+++ b/output/Vortrag_Weichenantriebe.pptx
@@ -3183,8 +3183,8 @@
         </p:nvSpPr>
         <p:spPr>
           <a:xfrm>
-            <a:off x="457200" y="91440"/>
-            <a:ext cx="11274552" cy="594360"/>
+            <a:off x="411480" y="91440"/>
+            <a:ext cx="11365992" cy="594360"/>
           </a:xfrm>
           <a:prstGeom prst="rect">
             <a:avLst/>
@@ -3199,7 +3199,7 @@
           <a:p>
             <a:pPr algn="l"/>
             <a:r>
-              <a:rPr sz="2400" b="1" i="0">
+              <a:rPr sz="2200" b="1" i="0">
                 <a:solidFill>
                   <a:srgbClr val="FFFFFF"/>
                 </a:solidFill>
@@ -3218,8 +3218,8 @@
         </p:nvSpPr>
         <p:spPr>
           <a:xfrm>
-            <a:off x="457200" y="658368"/>
-            <a:ext cx="11274552" cy="457200"/>
+            <a:off x="411480" y="640080"/>
+            <a:ext cx="11365992" cy="530352"/>
           </a:xfrm>
           <a:prstGeom prst="rect">
             <a:avLst/>
@@ -3234,7 +3234,7 @@
           <a:p>
             <a:pPr algn="l"/>
             <a:r>
-              <a:rPr sz="1400" b="0" i="0">
+              <a:rPr sz="1300" b="0" i="0">
                 <a:solidFill>
                   <a:srgbClr val="FFFFFF"/>
                 </a:solidFill>
@@ -3245,98 +3245,40 @@
           </a:p>
         </p:txBody>
       </p:sp>
-      <p:sp>
-        <p:nvSpPr>
-          <p:cNvPr id="6" name="Rectangle 5"/>
-          <p:cNvSpPr/>
+      <p:pic>
+        <p:nvPicPr>
+          <p:cNvPr id="6" name="Picture 5" descr="image.png"/>
+          <p:cNvPicPr>
+            <a:picLocks noChangeAspect="1"/>
+          </p:cNvPicPr>
           <p:nvPr/>
-        </p:nvSpPr>
+        </p:nvPicPr>
+        <p:blipFill>
+          <a:blip r:embed="rId2"/>
+          <a:stretch>
+            <a:fillRect/>
+          </a:stretch>
+        </p:blipFill>
         <p:spPr>
           <a:xfrm>
-            <a:off x="457200" y="1325880"/>
-            <a:ext cx="5500116" cy="4663440"/>
+            <a:off x="411480" y="1307592"/>
+            <a:ext cx="5577840" cy="4160520"/>
           </a:xfrm>
           <a:prstGeom prst="rect">
             <a:avLst/>
           </a:prstGeom>
-          <a:solidFill>
-            <a:srgbClr val="F2F2F2"/>
-          </a:solidFill>
-          <a:ln>
-            <a:solidFill>
-              <a:srgbClr val="009999"/>
-            </a:solidFill>
-          </a:ln>
         </p:spPr>
-        <p:style>
-          <a:lnRef idx="1">
-            <a:schemeClr val="accent1"/>
-          </a:lnRef>
-          <a:fillRef idx="3">
-            <a:schemeClr val="accent1"/>
-          </a:fillRef>
-          <a:effectRef idx="2">
-            <a:schemeClr val="accent1"/>
-          </a:effectRef>
-          <a:fontRef idx="minor">
-            <a:schemeClr val="lt1"/>
-          </a:fontRef>
-        </p:style>
-        <p:txBody>
-          <a:bodyPr rtlCol="0" anchor="ctr"/>
-          <a:lstStyle/>
-          <a:p>
-            <a:pPr algn="ctr"/>
-          </a:p>
-        </p:txBody>
-      </p:sp>
-      <p:sp>
-        <p:nvSpPr>
-          <p:cNvPr id="7" name="TextBox 6"/>
-          <p:cNvSpPr txBox="1"/>
+      </p:pic>
+      <p:sp>
+        <p:nvSpPr>
+          <p:cNvPr id="7" name="Rectangle 6"/>
+          <p:cNvSpPr/>
           <p:nvPr/>
         </p:nvSpPr>
         <p:spPr>
           <a:xfrm>
-            <a:off x="548640" y="1463040"/>
-            <a:ext cx="5317236" cy="4480560"/>
-          </a:xfrm>
-          <a:prstGeom prst="rect">
-            <a:avLst/>
-          </a:prstGeom>
-          <a:noFill/>
-        </p:spPr>
-        <p:txBody>
-          <a:bodyPr wrap="square">
-            <a:spAutoFit/>
-          </a:bodyPr>
-          <a:lstStyle/>
-          <a:p>
-            <a:pPr algn="ctr"/>
-            <a:r>
-              <a:rPr sz="1100" b="0" i="1">
-                <a:solidFill>
-                  <a:srgbClr val="A8A8A8"/>
-                </a:solidFill>
-                <a:latin typeface="Calibri"/>
-              </a:rPr>
-              <a:t>[ Power BI Chart hier einfügen ]
-Power-BI-Chart (Bubble Chart)
-X = Reifegrad | Y = Relevanz für Siemens | Größe = Marktpotenzial</a:t>
-            </a:r>
-          </a:p>
-        </p:txBody>
-      </p:sp>
-      <p:sp>
-        <p:nvSpPr>
-          <p:cNvPr id="8" name="Rectangle 7"/>
-          <p:cNvSpPr/>
-          <p:nvPr/>
-        </p:nvSpPr>
-        <p:spPr>
-          <a:xfrm>
-            <a:off x="6076188" y="1325880"/>
-            <a:ext cx="36576" cy="4663440"/>
+            <a:off x="6099048" y="1307592"/>
+            <a:ext cx="27432" cy="4754880"/>
           </a:xfrm>
           <a:prstGeom prst="rect">
             <a:avLst/>
@@ -3372,14 +3314,14 @@
       </p:sp>
       <p:sp>
         <p:nvSpPr>
-          <p:cNvPr id="9" name="TextBox 8"/>
+          <p:cNvPr id="8" name="TextBox 7"/>
           <p:cNvSpPr txBox="1"/>
           <p:nvPr/>
         </p:nvSpPr>
         <p:spPr>
           <a:xfrm>
-            <a:off x="6231636" y="1325880"/>
-            <a:ext cx="5500116" cy="347472"/>
+            <a:off x="6208776" y="1307592"/>
+            <a:ext cx="5568696" cy="329184"/>
           </a:xfrm>
           <a:prstGeom prst="rect">
             <a:avLst/>
@@ -3394,7 +3336,7 @@
           <a:p>
             <a:pPr algn="l"/>
             <a:r>
-              <a:rPr sz="1400" b="1" i="0">
+              <a:rPr sz="1300" b="1" i="0">
                 <a:solidFill>
                   <a:srgbClr val="00305E"/>
                 </a:solidFill>
@@ -3407,57 +3349,14 @@
       </p:sp>
       <p:sp>
         <p:nvSpPr>
-          <p:cNvPr id="10" name="Rectangle 9"/>
-          <p:cNvSpPr/>
+          <p:cNvPr id="9" name="TextBox 8"/>
+          <p:cNvSpPr txBox="1"/>
           <p:nvPr/>
         </p:nvSpPr>
         <p:spPr>
           <a:xfrm>
-            <a:off x="6231636" y="1709928"/>
-            <a:ext cx="73152" cy="804672"/>
-          </a:xfrm>
-          <a:prstGeom prst="rect">
-            <a:avLst/>
-          </a:prstGeom>
-          <a:solidFill>
-            <a:srgbClr val="009999"/>
-          </a:solidFill>
-          <a:ln>
-            <a:noFill/>
-          </a:ln>
-        </p:spPr>
-        <p:style>
-          <a:lnRef idx="1">
-            <a:schemeClr val="accent1"/>
-          </a:lnRef>
-          <a:fillRef idx="3">
-            <a:schemeClr val="accent1"/>
-          </a:fillRef>
-          <a:effectRef idx="2">
-            <a:schemeClr val="accent1"/>
-          </a:effectRef>
-          <a:fontRef idx="minor">
-            <a:schemeClr val="lt1"/>
-          </a:fontRef>
-        </p:style>
-        <p:txBody>
-          <a:bodyPr rtlCol="0" anchor="ctr"/>
-          <a:lstStyle/>
-          <a:p>
-            <a:pPr algn="ctr"/>
-          </a:p>
-        </p:txBody>
-      </p:sp>
-      <p:sp>
-        <p:nvSpPr>
-          <p:cNvPr id="11" name="TextBox 10"/>
-          <p:cNvSpPr txBox="1"/>
-          <p:nvPr/>
-        </p:nvSpPr>
-        <p:spPr>
-          <a:xfrm>
-            <a:off x="6359652" y="1709928"/>
-            <a:ext cx="5335524" cy="256032"/>
+            <a:off x="6208776" y="1673352"/>
+            <a:ext cx="5568696" cy="3749040"/>
           </a:xfrm>
           <a:prstGeom prst="rect">
             <a:avLst/>
@@ -3470,516 +3369,177 @@
           </a:bodyPr>
           <a:lstStyle/>
           <a:p>
-            <a:pPr algn="l"/>
-            <a:r>
-              <a:rPr sz="1200" b="1" i="0">
+            <a:pPr>
+              <a:spcBef>
+                <a:spcPts val="500"/>
+              </a:spcBef>
+            </a:pPr>
+            <a:r>
+              <a:rPr sz="1300" b="1">
                 <a:solidFill>
                   <a:srgbClr val="00305E"/>
                 </a:solidFill>
                 <a:latin typeface="Calibri"/>
               </a:rPr>
-              <a:t>Condition Monitoring &amp; Predictive Maintenance</a:t>
-            </a:r>
-          </a:p>
-        </p:txBody>
-      </p:sp>
-      <p:sp>
-        <p:nvSpPr>
-          <p:cNvPr id="12" name="TextBox 11"/>
-          <p:cNvSpPr txBox="1"/>
+              <a:t>▸  Condition Monitoring &amp; Predictive Maintenance</a:t>
+            </a:r>
+          </a:p>
+          <a:p>
+            <a:pPr>
+              <a:spcBef>
+                <a:spcPts val="0"/>
+              </a:spcBef>
+            </a:pPr>
+            <a:r>
+              <a:rPr sz="1050">
+                <a:solidFill>
+                  <a:srgbClr val="1A1A1A"/>
+                </a:solidFill>
+                <a:latin typeface="Calibri"/>
+              </a:rPr>
+              <a:t>    IoT-Sensoren + KI-Analyse → Wartungskosten –20–30 %</a:t>
+            </a:r>
+          </a:p>
+          <a:p>
+            <a:pPr>
+              <a:spcBef>
+                <a:spcPts val="500"/>
+              </a:spcBef>
+            </a:pPr>
+            <a:r>
+              <a:rPr sz="1300" b="1">
+                <a:solidFill>
+                  <a:srgbClr val="00305E"/>
+                </a:solidFill>
+                <a:latin typeface="Calibri"/>
+              </a:rPr>
+              <a:t>▸  Digitale Stellwerksintegration (EULYNX)</a:t>
+            </a:r>
+          </a:p>
+          <a:p>
+            <a:pPr>
+              <a:spcBef>
+                <a:spcPts val="0"/>
+              </a:spcBef>
+            </a:pPr>
+            <a:r>
+              <a:rPr sz="1050">
+                <a:solidFill>
+                  <a:srgbClr val="1A1A1A"/>
+                </a:solidFill>
+                <a:latin typeface="Calibri"/>
+              </a:rPr>
+              <a:t>    EU-Norm ersetzt analoge Relaistechnik → offene Schnittstellen Pflicht</a:t>
+            </a:r>
+          </a:p>
+          <a:p>
+            <a:pPr>
+              <a:spcBef>
+                <a:spcPts val="500"/>
+              </a:spcBef>
+            </a:pPr>
+            <a:r>
+              <a:rPr sz="1300" b="1">
+                <a:solidFill>
+                  <a:srgbClr val="00305E"/>
+                </a:solidFill>
+                <a:latin typeface="Calibri"/>
+              </a:rPr>
+              <a:t>▸  Elektrifizierung &amp; Energieeffizienz</a:t>
+            </a:r>
+          </a:p>
+          <a:p>
+            <a:pPr>
+              <a:spcBef>
+                <a:spcPts val="0"/>
+              </a:spcBef>
+            </a:pPr>
+            <a:r>
+              <a:rPr sz="1050">
+                <a:solidFill>
+                  <a:srgbClr val="1A1A1A"/>
+                </a:solidFill>
+                <a:latin typeface="Calibri"/>
+              </a:rPr>
+              <a:t>    Ablösung hydraulischer Antriebe; Rückspeisung beim Schaltvorgang</a:t>
+            </a:r>
+          </a:p>
+          <a:p>
+            <a:pPr>
+              <a:spcBef>
+                <a:spcPts val="500"/>
+              </a:spcBef>
+            </a:pPr>
+            <a:r>
+              <a:rPr sz="1300" b="1">
+                <a:solidFill>
+                  <a:srgbClr val="00305E"/>
+                </a:solidFill>
+                <a:latin typeface="Calibri"/>
+              </a:rPr>
+              <a:t>▸  Cybersecurity  (NIS2 / IEC 62443)</a:t>
+            </a:r>
+          </a:p>
+          <a:p>
+            <a:pPr>
+              <a:spcBef>
+                <a:spcPts val="0"/>
+              </a:spcBef>
+            </a:pPr>
+            <a:r>
+              <a:rPr sz="1050">
+                <a:solidFill>
+                  <a:srgbClr val="1A1A1A"/>
+                </a:solidFill>
+                <a:latin typeface="Calibri"/>
+              </a:rPr>
+              <a:t>    Security-by-Design in Firmware und Feldbusse verpflichtend</a:t>
+            </a:r>
+          </a:p>
+          <a:p>
+            <a:pPr>
+              <a:spcBef>
+                <a:spcPts val="500"/>
+              </a:spcBef>
+            </a:pPr>
+            <a:r>
+              <a:rPr sz="1300" b="1">
+                <a:solidFill>
+                  <a:srgbClr val="00305E"/>
+                </a:solidFill>
+                <a:latin typeface="Calibri"/>
+              </a:rPr>
+              <a:t>▸  Remote Diagnostics &amp; Cloud  (Railigent X)</a:t>
+            </a:r>
+          </a:p>
+          <a:p>
+            <a:pPr>
+              <a:spcBef>
+                <a:spcPts val="0"/>
+              </a:spcBef>
+            </a:pPr>
+            <a:r>
+              <a:rPr sz="1050">
+                <a:solidFill>
+                  <a:srgbClr val="1A1A1A"/>
+                </a:solidFill>
+                <a:latin typeface="Calibri"/>
+              </a:rPr>
+              <a:t>    Fernüberwachung → Vor-Ort-Einsätze signifikant reduziert</a:t>
+            </a:r>
+          </a:p>
+        </p:txBody>
+      </p:sp>
+      <p:sp>
+        <p:nvSpPr>
+          <p:cNvPr id="10" name="Rectangle 9"/>
+          <p:cNvSpPr/>
           <p:nvPr/>
         </p:nvSpPr>
         <p:spPr>
           <a:xfrm>
-            <a:off x="6359652" y="1947672"/>
-            <a:ext cx="5335524" cy="201168"/>
-          </a:xfrm>
-          <a:prstGeom prst="rect">
-            <a:avLst/>
-          </a:prstGeom>
-          <a:noFill/>
-        </p:spPr>
-        <p:txBody>
-          <a:bodyPr wrap="square">
-            <a:spAutoFit/>
-          </a:bodyPr>
-          <a:lstStyle/>
-          <a:p>
-            <a:pPr algn="l"/>
-            <a:r>
-              <a:rPr sz="1000" b="0" i="0">
-                <a:solidFill>
-                  <a:srgbClr val="1A1A1A"/>
-                </a:solidFill>
-                <a:latin typeface="Calibri"/>
-              </a:rPr>
-              <a:t>IoT-Sensoren + KI → Wartungskosten –20–30 %</a:t>
-            </a:r>
-          </a:p>
-        </p:txBody>
-      </p:sp>
-      <p:sp>
-        <p:nvSpPr>
-          <p:cNvPr id="13" name="Rectangle 12"/>
-          <p:cNvSpPr/>
-          <p:nvPr/>
-        </p:nvSpPr>
-        <p:spPr>
-          <a:xfrm>
-            <a:off x="6231636" y="2560320"/>
-            <a:ext cx="73152" cy="804672"/>
-          </a:xfrm>
-          <a:prstGeom prst="rect">
-            <a:avLst/>
-          </a:prstGeom>
-          <a:solidFill>
-            <a:srgbClr val="009999"/>
-          </a:solidFill>
-          <a:ln>
-            <a:noFill/>
-          </a:ln>
-        </p:spPr>
-        <p:style>
-          <a:lnRef idx="1">
-            <a:schemeClr val="accent1"/>
-          </a:lnRef>
-          <a:fillRef idx="3">
-            <a:schemeClr val="accent1"/>
-          </a:fillRef>
-          <a:effectRef idx="2">
-            <a:schemeClr val="accent1"/>
-          </a:effectRef>
-          <a:fontRef idx="minor">
-            <a:schemeClr val="lt1"/>
-          </a:fontRef>
-        </p:style>
-        <p:txBody>
-          <a:bodyPr rtlCol="0" anchor="ctr"/>
-          <a:lstStyle/>
-          <a:p>
-            <a:pPr algn="ctr"/>
-          </a:p>
-        </p:txBody>
-      </p:sp>
-      <p:sp>
-        <p:nvSpPr>
-          <p:cNvPr id="14" name="TextBox 13"/>
-          <p:cNvSpPr txBox="1"/>
-          <p:nvPr/>
-        </p:nvSpPr>
-        <p:spPr>
-          <a:xfrm>
-            <a:off x="6359652" y="2560320"/>
-            <a:ext cx="5335524" cy="256032"/>
-          </a:xfrm>
-          <a:prstGeom prst="rect">
-            <a:avLst/>
-          </a:prstGeom>
-          <a:noFill/>
-        </p:spPr>
-        <p:txBody>
-          <a:bodyPr wrap="square">
-            <a:spAutoFit/>
-          </a:bodyPr>
-          <a:lstStyle/>
-          <a:p>
-            <a:pPr algn="l"/>
-            <a:r>
-              <a:rPr sz="1200" b="1" i="0">
-                <a:solidFill>
-                  <a:srgbClr val="00305E"/>
-                </a:solidFill>
-                <a:latin typeface="Calibri"/>
-              </a:rPr>
-              <a:t>Digitale Stellwerksintegration (EULYNX)</a:t>
-            </a:r>
-          </a:p>
-        </p:txBody>
-      </p:sp>
-      <p:sp>
-        <p:nvSpPr>
-          <p:cNvPr id="15" name="TextBox 14"/>
-          <p:cNvSpPr txBox="1"/>
-          <p:nvPr/>
-        </p:nvSpPr>
-        <p:spPr>
-          <a:xfrm>
-            <a:off x="6359652" y="2798064"/>
-            <a:ext cx="5335524" cy="201168"/>
-          </a:xfrm>
-          <a:prstGeom prst="rect">
-            <a:avLst/>
-          </a:prstGeom>
-          <a:noFill/>
-        </p:spPr>
-        <p:txBody>
-          <a:bodyPr wrap="square">
-            <a:spAutoFit/>
-          </a:bodyPr>
-          <a:lstStyle/>
-          <a:p>
-            <a:pPr algn="l"/>
-            <a:r>
-              <a:rPr sz="1000" b="0" i="0">
-                <a:solidFill>
-                  <a:srgbClr val="1A1A1A"/>
-                </a:solidFill>
-                <a:latin typeface="Calibri"/>
-              </a:rPr>
-              <a:t>EU-Norm ersetzt analoge Relaistechnik</a:t>
-            </a:r>
-          </a:p>
-        </p:txBody>
-      </p:sp>
-      <p:sp>
-        <p:nvSpPr>
-          <p:cNvPr id="16" name="Rectangle 15"/>
-          <p:cNvSpPr/>
-          <p:nvPr/>
-        </p:nvSpPr>
-        <p:spPr>
-          <a:xfrm>
-            <a:off x="6231636" y="3410712"/>
-            <a:ext cx="73152" cy="804672"/>
-          </a:xfrm>
-          <a:prstGeom prst="rect">
-            <a:avLst/>
-          </a:prstGeom>
-          <a:solidFill>
-            <a:srgbClr val="009999"/>
-          </a:solidFill>
-          <a:ln>
-            <a:noFill/>
-          </a:ln>
-        </p:spPr>
-        <p:style>
-          <a:lnRef idx="1">
-            <a:schemeClr val="accent1"/>
-          </a:lnRef>
-          <a:fillRef idx="3">
-            <a:schemeClr val="accent1"/>
-          </a:fillRef>
-          <a:effectRef idx="2">
-            <a:schemeClr val="accent1"/>
-          </a:effectRef>
-          <a:fontRef idx="minor">
-            <a:schemeClr val="lt1"/>
-          </a:fontRef>
-        </p:style>
-        <p:txBody>
-          <a:bodyPr rtlCol="0" anchor="ctr"/>
-          <a:lstStyle/>
-          <a:p>
-            <a:pPr algn="ctr"/>
-          </a:p>
-        </p:txBody>
-      </p:sp>
-      <p:sp>
-        <p:nvSpPr>
-          <p:cNvPr id="17" name="TextBox 16"/>
-          <p:cNvSpPr txBox="1"/>
-          <p:nvPr/>
-        </p:nvSpPr>
-        <p:spPr>
-          <a:xfrm>
-            <a:off x="6359652" y="3410712"/>
-            <a:ext cx="5335524" cy="256032"/>
-          </a:xfrm>
-          <a:prstGeom prst="rect">
-            <a:avLst/>
-          </a:prstGeom>
-          <a:noFill/>
-        </p:spPr>
-        <p:txBody>
-          <a:bodyPr wrap="square">
-            <a:spAutoFit/>
-          </a:bodyPr>
-          <a:lstStyle/>
-          <a:p>
-            <a:pPr algn="l"/>
-            <a:r>
-              <a:rPr sz="1200" b="1" i="0">
-                <a:solidFill>
-                  <a:srgbClr val="00305E"/>
-                </a:solidFill>
-                <a:latin typeface="Calibri"/>
-              </a:rPr>
-              <a:t>Elektrifizierung &amp; Energieeffizienz</a:t>
-            </a:r>
-          </a:p>
-        </p:txBody>
-      </p:sp>
-      <p:sp>
-        <p:nvSpPr>
-          <p:cNvPr id="18" name="TextBox 17"/>
-          <p:cNvSpPr txBox="1"/>
-          <p:nvPr/>
-        </p:nvSpPr>
-        <p:spPr>
-          <a:xfrm>
-            <a:off x="6359652" y="3648456"/>
-            <a:ext cx="5335524" cy="201168"/>
-          </a:xfrm>
-          <a:prstGeom prst="rect">
-            <a:avLst/>
-          </a:prstGeom>
-          <a:noFill/>
-        </p:spPr>
-        <p:txBody>
-          <a:bodyPr wrap="square">
-            <a:spAutoFit/>
-          </a:bodyPr>
-          <a:lstStyle/>
-          <a:p>
-            <a:pPr algn="l"/>
-            <a:r>
-              <a:rPr sz="1000" b="0" i="0">
-                <a:solidFill>
-                  <a:srgbClr val="1A1A1A"/>
-                </a:solidFill>
-                <a:latin typeface="Calibri"/>
-              </a:rPr>
-              <a:t>Ablösung hydraulischer Antriebe; Energierückspeisung</a:t>
-            </a:r>
-          </a:p>
-        </p:txBody>
-      </p:sp>
-      <p:sp>
-        <p:nvSpPr>
-          <p:cNvPr id="19" name="Rectangle 18"/>
-          <p:cNvSpPr/>
-          <p:nvPr/>
-        </p:nvSpPr>
-        <p:spPr>
-          <a:xfrm>
-            <a:off x="6231636" y="4261104"/>
-            <a:ext cx="73152" cy="804672"/>
-          </a:xfrm>
-          <a:prstGeom prst="rect">
-            <a:avLst/>
-          </a:prstGeom>
-          <a:solidFill>
-            <a:srgbClr val="009999"/>
-          </a:solidFill>
-          <a:ln>
-            <a:noFill/>
-          </a:ln>
-        </p:spPr>
-        <p:style>
-          <a:lnRef idx="1">
-            <a:schemeClr val="accent1"/>
-          </a:lnRef>
-          <a:fillRef idx="3">
-            <a:schemeClr val="accent1"/>
-          </a:fillRef>
-          <a:effectRef idx="2">
-            <a:schemeClr val="accent1"/>
-          </a:effectRef>
-          <a:fontRef idx="minor">
-            <a:schemeClr val="lt1"/>
-          </a:fontRef>
-        </p:style>
-        <p:txBody>
-          <a:bodyPr rtlCol="0" anchor="ctr"/>
-          <a:lstStyle/>
-          <a:p>
-            <a:pPr algn="ctr"/>
-          </a:p>
-        </p:txBody>
-      </p:sp>
-      <p:sp>
-        <p:nvSpPr>
-          <p:cNvPr id="20" name="TextBox 19"/>
-          <p:cNvSpPr txBox="1"/>
-          <p:nvPr/>
-        </p:nvSpPr>
-        <p:spPr>
-          <a:xfrm>
-            <a:off x="6359652" y="4261104"/>
-            <a:ext cx="5335524" cy="256032"/>
-          </a:xfrm>
-          <a:prstGeom prst="rect">
-            <a:avLst/>
-          </a:prstGeom>
-          <a:noFill/>
-        </p:spPr>
-        <p:txBody>
-          <a:bodyPr wrap="square">
-            <a:spAutoFit/>
-          </a:bodyPr>
-          <a:lstStyle/>
-          <a:p>
-            <a:pPr algn="l"/>
-            <a:r>
-              <a:rPr sz="1200" b="1" i="0">
-                <a:solidFill>
-                  <a:srgbClr val="00305E"/>
-                </a:solidFill>
-                <a:latin typeface="Calibri"/>
-              </a:rPr>
-              <a:t>Cybersecurity (NIS2 / IEC 62443)</a:t>
-            </a:r>
-          </a:p>
-        </p:txBody>
-      </p:sp>
-      <p:sp>
-        <p:nvSpPr>
-          <p:cNvPr id="21" name="TextBox 20"/>
-          <p:cNvSpPr txBox="1"/>
-          <p:nvPr/>
-        </p:nvSpPr>
-        <p:spPr>
-          <a:xfrm>
-            <a:off x="6359652" y="4498848"/>
-            <a:ext cx="5335524" cy="201168"/>
-          </a:xfrm>
-          <a:prstGeom prst="rect">
-            <a:avLst/>
-          </a:prstGeom>
-          <a:noFill/>
-        </p:spPr>
-        <p:txBody>
-          <a:bodyPr wrap="square">
-            <a:spAutoFit/>
-          </a:bodyPr>
-          <a:lstStyle/>
-          <a:p>
-            <a:pPr algn="l"/>
-            <a:r>
-              <a:rPr sz="1000" b="0" i="0">
-                <a:solidFill>
-                  <a:srgbClr val="1A1A1A"/>
-                </a:solidFill>
-                <a:latin typeface="Calibri"/>
-              </a:rPr>
-              <a:t>Security-by-Design in Firmware verpflichtend</a:t>
-            </a:r>
-          </a:p>
-        </p:txBody>
-      </p:sp>
-      <p:sp>
-        <p:nvSpPr>
-          <p:cNvPr id="22" name="Rectangle 21"/>
-          <p:cNvSpPr/>
-          <p:nvPr/>
-        </p:nvSpPr>
-        <p:spPr>
-          <a:xfrm>
-            <a:off x="6231636" y="5111496"/>
-            <a:ext cx="73152" cy="804672"/>
-          </a:xfrm>
-          <a:prstGeom prst="rect">
-            <a:avLst/>
-          </a:prstGeom>
-          <a:solidFill>
-            <a:srgbClr val="009999"/>
-          </a:solidFill>
-          <a:ln>
-            <a:noFill/>
-          </a:ln>
-        </p:spPr>
-        <p:style>
-          <a:lnRef idx="1">
-            <a:schemeClr val="accent1"/>
-          </a:lnRef>
-          <a:fillRef idx="3">
-            <a:schemeClr val="accent1"/>
-          </a:fillRef>
-          <a:effectRef idx="2">
-            <a:schemeClr val="accent1"/>
-          </a:effectRef>
-          <a:fontRef idx="minor">
-            <a:schemeClr val="lt1"/>
-          </a:fontRef>
-        </p:style>
-        <p:txBody>
-          <a:bodyPr rtlCol="0" anchor="ctr"/>
-          <a:lstStyle/>
-          <a:p>
-            <a:pPr algn="ctr"/>
-          </a:p>
-        </p:txBody>
-      </p:sp>
-      <p:sp>
-        <p:nvSpPr>
-          <p:cNvPr id="23" name="TextBox 22"/>
-          <p:cNvSpPr txBox="1"/>
-          <p:nvPr/>
-        </p:nvSpPr>
-        <p:spPr>
-          <a:xfrm>
-            <a:off x="6359652" y="5111496"/>
-            <a:ext cx="5335524" cy="256032"/>
-          </a:xfrm>
-          <a:prstGeom prst="rect">
-            <a:avLst/>
-          </a:prstGeom>
-          <a:noFill/>
-        </p:spPr>
-        <p:txBody>
-          <a:bodyPr wrap="square">
-            <a:spAutoFit/>
-          </a:bodyPr>
-          <a:lstStyle/>
-          <a:p>
-            <a:pPr algn="l"/>
-            <a:r>
-              <a:rPr sz="1200" b="1" i="0">
-                <a:solidFill>
-                  <a:srgbClr val="00305E"/>
-                </a:solidFill>
-                <a:latin typeface="Calibri"/>
-              </a:rPr>
-              <a:t>Remote Diagnostics &amp; Cloud (Railigent X)</a:t>
-            </a:r>
-          </a:p>
-        </p:txBody>
-      </p:sp>
-      <p:sp>
-        <p:nvSpPr>
-          <p:cNvPr id="24" name="TextBox 23"/>
-          <p:cNvSpPr txBox="1"/>
-          <p:nvPr/>
-        </p:nvSpPr>
-        <p:spPr>
-          <a:xfrm>
-            <a:off x="6359652" y="5349240"/>
-            <a:ext cx="5335524" cy="201168"/>
-          </a:xfrm>
-          <a:prstGeom prst="rect">
-            <a:avLst/>
-          </a:prstGeom>
-          <a:noFill/>
-        </p:spPr>
-        <p:txBody>
-          <a:bodyPr wrap="square">
-            <a:spAutoFit/>
-          </a:bodyPr>
-          <a:lstStyle/>
-          <a:p>
-            <a:pPr algn="l"/>
-            <a:r>
-              <a:rPr sz="1000" b="0" i="0">
-                <a:solidFill>
-                  <a:srgbClr val="1A1A1A"/>
-                </a:solidFill>
-                <a:latin typeface="Calibri"/>
-              </a:rPr>
-              <a:t>Fernüberwachung → Vor-Ort-Einsätze signifikant ↓</a:t>
-            </a:r>
-          </a:p>
-        </p:txBody>
-      </p:sp>
-      <p:sp>
-        <p:nvSpPr>
-          <p:cNvPr id="25" name="Rectangle 24"/>
-          <p:cNvSpPr/>
-          <p:nvPr/>
-        </p:nvSpPr>
-        <p:spPr>
-          <a:xfrm>
-            <a:off x="457200" y="5989320"/>
-            <a:ext cx="11274552" cy="329184"/>
+            <a:off x="411480" y="6089904"/>
+            <a:ext cx="11365992" cy="347472"/>
           </a:xfrm>
           <a:prstGeom prst="rect">
             <a:avLst/>
@@ -4015,14 +3575,14 @@
       </p:sp>
       <p:sp>
         <p:nvSpPr>
-          <p:cNvPr id="26" name="TextBox 25"/>
+          <p:cNvPr id="11" name="TextBox 10"/>
           <p:cNvSpPr txBox="1"/>
           <p:nvPr/>
         </p:nvSpPr>
         <p:spPr>
           <a:xfrm>
-            <a:off x="548640" y="6016752"/>
-            <a:ext cx="11091672" cy="292608"/>
+            <a:off x="521208" y="6126480"/>
+            <a:ext cx="11146536" cy="292608"/>
           </a:xfrm>
           <a:prstGeom prst="rect">
             <a:avLst/>
@@ -4037,7 +3597,7 @@
           <a:p>
             <a:pPr algn="l"/>
             <a:r>
-              <a:rPr sz="1000" b="1" i="0">
+              <a:rPr sz="950" b="1" i="0">
                 <a:solidFill>
                   <a:srgbClr val="FFFFFF"/>
                 </a:solidFill>
@@ -4050,7 +3610,7 @@
       </p:sp>
       <p:sp>
         <p:nvSpPr>
-          <p:cNvPr id="27" name="Rectangle 26"/>
+          <p:cNvPr id="12" name="Rectangle 11"/>
           <p:cNvSpPr/>
           <p:nvPr/>
         </p:nvSpPr>
@@ -4093,14 +3653,14 @@
       </p:sp>
       <p:sp>
         <p:nvSpPr>
-          <p:cNvPr id="28" name="TextBox 27"/>
+          <p:cNvPr id="13" name="TextBox 12"/>
           <p:cNvSpPr txBox="1"/>
           <p:nvPr/>
         </p:nvSpPr>
         <p:spPr>
           <a:xfrm>
-            <a:off x="457200" y="6510528"/>
-            <a:ext cx="11274552" cy="329184"/>
+            <a:off x="411480" y="6528816"/>
+            <a:ext cx="11365992" cy="310896"/>
           </a:xfrm>
           <a:prstGeom prst="rect">
             <a:avLst/>
@@ -4115,13 +3675,13 @@
           <a:p>
             <a:pPr algn="l"/>
             <a:r>
-              <a:rPr sz="900" b="0" i="0">
+              <a:rPr sz="800" b="0" i="0">
                 <a:solidFill>
                   <a:srgbClr val="FFFFFF"/>
                 </a:solidFill>
                 <a:latin typeface="Calibri"/>
               </a:rPr>
-              <a:t>Quellen: Siemens Mobility GB 2024 | Europe's Rail JU Roadmap 2025 | Bundesministerium für Digitales und Verkehr (Deutschlandtakt) | Eigene Schätzung</a:t>
+              <a:t>Quellen: Siemens Mobility GB 2024 | Europe's Rail JU Roadmap 2025 | BMDV Deutschlandtakt | Eigene Schätzung</a:t>
             </a:r>
           </a:p>
         </p:txBody>
@@ -4238,8 +3798,8 @@
         </p:nvSpPr>
         <p:spPr>
           <a:xfrm>
-            <a:off x="457200" y="91440"/>
-            <a:ext cx="11274552" cy="594360"/>
+            <a:off x="411480" y="91440"/>
+            <a:ext cx="11365992" cy="594360"/>
           </a:xfrm>
           <a:prstGeom prst="rect">
             <a:avLst/>
@@ -4254,7 +3814,7 @@
           <a:p>
             <a:pPr algn="l"/>
             <a:r>
-              <a:rPr sz="2400" b="1" i="0">
+              <a:rPr sz="2200" b="1" i="0">
                 <a:solidFill>
                   <a:srgbClr val="FFFFFF"/>
                 </a:solidFill>
@@ -4273,8 +3833,8 @@
         </p:nvSpPr>
         <p:spPr>
           <a:xfrm>
-            <a:off x="457200" y="658368"/>
-            <a:ext cx="11274552" cy="457200"/>
+            <a:off x="411480" y="640080"/>
+            <a:ext cx="11365992" cy="530352"/>
           </a:xfrm>
           <a:prstGeom prst="rect">
             <a:avLst/>
@@ -4289,7 +3849,7 @@
           <a:p>
             <a:pPr algn="l"/>
             <a:r>
-              <a:rPr sz="1400" b="0" i="0">
+              <a:rPr sz="1300" b="0" i="0">
                 <a:solidFill>
                   <a:srgbClr val="FFFFFF"/>
                 </a:solidFill>
@@ -4300,98 +3860,40 @@
           </a:p>
         </p:txBody>
       </p:sp>
-      <p:sp>
-        <p:nvSpPr>
-          <p:cNvPr id="6" name="Rectangle 5"/>
-          <p:cNvSpPr/>
+      <p:pic>
+        <p:nvPicPr>
+          <p:cNvPr id="6" name="Picture 5" descr="image.png"/>
+          <p:cNvPicPr>
+            <a:picLocks noChangeAspect="1"/>
+          </p:cNvPicPr>
           <p:nvPr/>
-        </p:nvSpPr>
+        </p:nvPicPr>
+        <p:blipFill>
+          <a:blip r:embed="rId2"/>
+          <a:stretch>
+            <a:fillRect/>
+          </a:stretch>
+        </p:blipFill>
         <p:spPr>
           <a:xfrm>
-            <a:off x="457200" y="1325880"/>
-            <a:ext cx="5500116" cy="4663440"/>
+            <a:off x="411480" y="1307592"/>
+            <a:ext cx="5577840" cy="4160520"/>
           </a:xfrm>
           <a:prstGeom prst="rect">
             <a:avLst/>
           </a:prstGeom>
-          <a:solidFill>
-            <a:srgbClr val="F2F2F2"/>
-          </a:solidFill>
-          <a:ln>
-            <a:solidFill>
-              <a:srgbClr val="009999"/>
-            </a:solidFill>
-          </a:ln>
         </p:spPr>
-        <p:style>
-          <a:lnRef idx="1">
-            <a:schemeClr val="accent1"/>
-          </a:lnRef>
-          <a:fillRef idx="3">
-            <a:schemeClr val="accent1"/>
-          </a:fillRef>
-          <a:effectRef idx="2">
-            <a:schemeClr val="accent1"/>
-          </a:effectRef>
-          <a:fontRef idx="minor">
-            <a:schemeClr val="lt1"/>
-          </a:fontRef>
-        </p:style>
-        <p:txBody>
-          <a:bodyPr rtlCol="0" anchor="ctr"/>
-          <a:lstStyle/>
-          <a:p>
-            <a:pPr algn="ctr"/>
-          </a:p>
-        </p:txBody>
-      </p:sp>
-      <p:sp>
-        <p:nvSpPr>
-          <p:cNvPr id="7" name="TextBox 6"/>
-          <p:cNvSpPr txBox="1"/>
+      </p:pic>
+      <p:sp>
+        <p:nvSpPr>
+          <p:cNvPr id="7" name="Rectangle 6"/>
+          <p:cNvSpPr/>
           <p:nvPr/>
         </p:nvSpPr>
         <p:spPr>
           <a:xfrm>
-            <a:off x="548640" y="1463040"/>
-            <a:ext cx="5317236" cy="4480560"/>
-          </a:xfrm>
-          <a:prstGeom prst="rect">
-            <a:avLst/>
-          </a:prstGeom>
-          <a:noFill/>
-        </p:spPr>
-        <p:txBody>
-          <a:bodyPr wrap="square">
-            <a:spAutoFit/>
-          </a:bodyPr>
-          <a:lstStyle/>
-          <a:p>
-            <a:pPr algn="ctr"/>
-            <a:r>
-              <a:rPr sz="1100" b="0" i="1">
-                <a:solidFill>
-                  <a:srgbClr val="A8A8A8"/>
-                </a:solidFill>
-                <a:latin typeface="Calibri"/>
-              </a:rPr>
-              <a:t>[ Power BI Chart hier einfügen ]
-Power-BI-Chart (Balkendiagramm)
-Umsatz Signaling-Segment nach Region (Mrd. EUR) – Top-3 Anbieter</a:t>
-            </a:r>
-          </a:p>
-        </p:txBody>
-      </p:sp>
-      <p:sp>
-        <p:nvSpPr>
-          <p:cNvPr id="8" name="Rectangle 7"/>
-          <p:cNvSpPr/>
-          <p:nvPr/>
-        </p:nvSpPr>
-        <p:spPr>
-          <a:xfrm>
-            <a:off x="6076188" y="1325880"/>
-            <a:ext cx="36576" cy="4663440"/>
+            <a:off x="6099048" y="1307592"/>
+            <a:ext cx="27432" cy="4754880"/>
           </a:xfrm>
           <a:prstGeom prst="rect">
             <a:avLst/>
@@ -4427,14 +3929,14 @@
       </p:sp>
       <p:sp>
         <p:nvSpPr>
-          <p:cNvPr id="9" name="TextBox 8"/>
+          <p:cNvPr id="8" name="TextBox 7"/>
           <p:cNvSpPr txBox="1"/>
           <p:nvPr/>
         </p:nvSpPr>
         <p:spPr>
           <a:xfrm>
-            <a:off x="6231636" y="1325880"/>
-            <a:ext cx="5500116" cy="347472"/>
+            <a:off x="6208776" y="1307592"/>
+            <a:ext cx="5568696" cy="329184"/>
           </a:xfrm>
           <a:prstGeom prst="rect">
             <a:avLst/>
@@ -4449,7 +3951,7 @@
           <a:p>
             <a:pPr algn="l"/>
             <a:r>
-              <a:rPr sz="1400" b="1" i="0">
+              <a:rPr sz="1300" b="1" i="0">
                 <a:solidFill>
                   <a:srgbClr val="00305E"/>
                 </a:solidFill>
@@ -4462,57 +3964,14 @@
       </p:sp>
       <p:sp>
         <p:nvSpPr>
-          <p:cNvPr id="10" name="Rectangle 9"/>
-          <p:cNvSpPr/>
+          <p:cNvPr id="9" name="TextBox 8"/>
+          <p:cNvSpPr txBox="1"/>
           <p:nvPr/>
         </p:nvSpPr>
         <p:spPr>
           <a:xfrm>
-            <a:off x="6231636" y="1709928"/>
-            <a:ext cx="73152" cy="804672"/>
-          </a:xfrm>
-          <a:prstGeom prst="rect">
-            <a:avLst/>
-          </a:prstGeom>
-          <a:solidFill>
-            <a:srgbClr val="009999"/>
-          </a:solidFill>
-          <a:ln>
-            <a:noFill/>
-          </a:ln>
-        </p:spPr>
-        <p:style>
-          <a:lnRef idx="1">
-            <a:schemeClr val="accent1"/>
-          </a:lnRef>
-          <a:fillRef idx="3">
-            <a:schemeClr val="accent1"/>
-          </a:fillRef>
-          <a:effectRef idx="2">
-            <a:schemeClr val="accent1"/>
-          </a:effectRef>
-          <a:fontRef idx="minor">
-            <a:schemeClr val="lt1"/>
-          </a:fontRef>
-        </p:style>
-        <p:txBody>
-          <a:bodyPr rtlCol="0" anchor="ctr"/>
-          <a:lstStyle/>
-          <a:p>
-            <a:pPr algn="ctr"/>
-          </a:p>
-        </p:txBody>
-      </p:sp>
-      <p:sp>
-        <p:nvSpPr>
-          <p:cNvPr id="11" name="TextBox 10"/>
-          <p:cNvSpPr txBox="1"/>
-          <p:nvPr/>
-        </p:nvSpPr>
-        <p:spPr>
-          <a:xfrm>
-            <a:off x="6359652" y="1709928"/>
-            <a:ext cx="5335524" cy="256032"/>
+            <a:off x="6208776" y="1673352"/>
+            <a:ext cx="5568696" cy="3749040"/>
           </a:xfrm>
           <a:prstGeom prst="rect">
             <a:avLst/>
@@ -4525,516 +3984,177 @@
           </a:bodyPr>
           <a:lstStyle/>
           <a:p>
-            <a:pPr algn="l"/>
-            <a:r>
-              <a:rPr sz="1200" b="1" i="0">
+            <a:pPr>
+              <a:spcBef>
+                <a:spcPts val="500"/>
+              </a:spcBef>
+            </a:pPr>
+            <a:r>
+              <a:rPr sz="1300" b="1">
                 <a:solidFill>
                   <a:srgbClr val="00305E"/>
                 </a:solidFill>
                 <a:latin typeface="Calibri"/>
               </a:rPr>
-              <a:t>Siemens Mobility</a:t>
-            </a:r>
-          </a:p>
-        </p:txBody>
-      </p:sp>
-      <p:sp>
-        <p:nvSpPr>
-          <p:cNvPr id="12" name="TextBox 11"/>
-          <p:cNvSpPr txBox="1"/>
+              <a:t>▸  Siemens Mobility</a:t>
+            </a:r>
+          </a:p>
+          <a:p>
+            <a:pPr>
+              <a:spcBef>
+                <a:spcPts val="0"/>
+              </a:spcBef>
+            </a:pPr>
+            <a:r>
+              <a:rPr sz="1050">
+                <a:solidFill>
+                  <a:srgbClr val="1A1A1A"/>
+                </a:solidFill>
+                <a:latin typeface="Calibri"/>
+              </a:rPr>
+              <a:t>    EULYNX-Leader, Railigent X, globales Servicenetz</a:t>
+            </a:r>
+          </a:p>
+          <a:p>
+            <a:pPr>
+              <a:spcBef>
+                <a:spcPts val="500"/>
+              </a:spcBef>
+            </a:pPr>
+            <a:r>
+              <a:rPr sz="1300" b="1">
+                <a:solidFill>
+                  <a:srgbClr val="00305E"/>
+                </a:solidFill>
+                <a:latin typeface="Calibri"/>
+              </a:rPr>
+              <a:t>▸  Alstom  (+Bombardier)</a:t>
+            </a:r>
+          </a:p>
+          <a:p>
+            <a:pPr>
+              <a:spcBef>
+                <a:spcPts val="0"/>
+              </a:spcBef>
+            </a:pPr>
+            <a:r>
+              <a:rPr sz="1050">
+                <a:solidFill>
+                  <a:srgbClr val="1A1A1A"/>
+                </a:solidFill>
+                <a:latin typeface="Calibri"/>
+              </a:rPr>
+              <a:t>    Breites Signaling-Portfolio, CBTC-Stärke in Metropolen</a:t>
+            </a:r>
+          </a:p>
+          <a:p>
+            <a:pPr>
+              <a:spcBef>
+                <a:spcPts val="500"/>
+              </a:spcBef>
+            </a:pPr>
+            <a:r>
+              <a:rPr sz="1300" b="1">
+                <a:solidFill>
+                  <a:srgbClr val="00305E"/>
+                </a:solidFill>
+                <a:latin typeface="Calibri"/>
+              </a:rPr>
+              <a:t>▸  Hitachi Rail  (ehem. Ansaldo STS)</a:t>
+            </a:r>
+          </a:p>
+          <a:p>
+            <a:pPr>
+              <a:spcBef>
+                <a:spcPts val="0"/>
+              </a:spcBef>
+            </a:pPr>
+            <a:r>
+              <a:rPr sz="1050">
+                <a:solidFill>
+                  <a:srgbClr val="1A1A1A"/>
+                </a:solidFill>
+                <a:latin typeface="Calibri"/>
+              </a:rPr>
+              <a:t>    Systemintegration, solide Europa &amp; Asien Präsenz</a:t>
+            </a:r>
+          </a:p>
+          <a:p>
+            <a:pPr>
+              <a:spcBef>
+                <a:spcPts val="500"/>
+              </a:spcBef>
+            </a:pPr>
+            <a:r>
+              <a:rPr sz="1300" b="1">
+                <a:solidFill>
+                  <a:srgbClr val="00305E"/>
+                </a:solidFill>
+                <a:latin typeface="Calibri"/>
+              </a:rPr>
+              <a:t>▸  Vossloh / Hanning &amp; Kahl</a:t>
+            </a:r>
+          </a:p>
+          <a:p>
+            <a:pPr>
+              <a:spcBef>
+                <a:spcPts val="0"/>
+              </a:spcBef>
+            </a:pPr>
+            <a:r>
+              <a:rPr sz="1050">
+                <a:solidFill>
+                  <a:srgbClr val="1A1A1A"/>
+                </a:solidFill>
+                <a:latin typeface="Calibri"/>
+              </a:rPr>
+              <a:t>    Nischenspezialisten – hohe Qualität, begrenztes Portfolio</a:t>
+            </a:r>
+          </a:p>
+          <a:p>
+            <a:pPr>
+              <a:spcBef>
+                <a:spcPts val="500"/>
+              </a:spcBef>
+            </a:pPr>
+            <a:r>
+              <a:rPr sz="1300" b="1">
+                <a:solidFill>
+                  <a:srgbClr val="00305E"/>
+                </a:solidFill>
+                <a:latin typeface="Calibri"/>
+              </a:rPr>
+              <a:t>▸  CRRC / CASCO</a:t>
+            </a:r>
+          </a:p>
+          <a:p>
+            <a:pPr>
+              <a:spcBef>
+                <a:spcPts val="0"/>
+              </a:spcBef>
+            </a:pPr>
+            <a:r>
+              <a:rPr sz="1050">
+                <a:solidFill>
+                  <a:srgbClr val="1A1A1A"/>
+                </a:solidFill>
+                <a:latin typeface="Calibri"/>
+              </a:rPr>
+              <a:t>    Preiswettbewerb, aggressiver Export nach Osteuropa &amp; Afrika</a:t>
+            </a:r>
+          </a:p>
+        </p:txBody>
+      </p:sp>
+      <p:sp>
+        <p:nvSpPr>
+          <p:cNvPr id="10" name="Rectangle 9"/>
+          <p:cNvSpPr/>
           <p:nvPr/>
         </p:nvSpPr>
         <p:spPr>
           <a:xfrm>
-            <a:off x="6359652" y="1947672"/>
-            <a:ext cx="5335524" cy="201168"/>
-          </a:xfrm>
-          <a:prstGeom prst="rect">
-            <a:avLst/>
-          </a:prstGeom>
-          <a:noFill/>
-        </p:spPr>
-        <p:txBody>
-          <a:bodyPr wrap="square">
-            <a:spAutoFit/>
-          </a:bodyPr>
-          <a:lstStyle/>
-          <a:p>
-            <a:pPr algn="l"/>
-            <a:r>
-              <a:rPr sz="1000" b="0" i="0">
-                <a:solidFill>
-                  <a:srgbClr val="1A1A1A"/>
-                </a:solidFill>
-                <a:latin typeface="Calibri"/>
-              </a:rPr>
-              <a:t>EULYNX-Leader, Railigent X, globales Servicenetz</a:t>
-            </a:r>
-          </a:p>
-        </p:txBody>
-      </p:sp>
-      <p:sp>
-        <p:nvSpPr>
-          <p:cNvPr id="13" name="Rectangle 12"/>
-          <p:cNvSpPr/>
-          <p:nvPr/>
-        </p:nvSpPr>
-        <p:spPr>
-          <a:xfrm>
-            <a:off x="6231636" y="2560320"/>
-            <a:ext cx="73152" cy="804672"/>
-          </a:xfrm>
-          <a:prstGeom prst="rect">
-            <a:avLst/>
-          </a:prstGeom>
-          <a:solidFill>
-            <a:srgbClr val="A8A8A8"/>
-          </a:solidFill>
-          <a:ln>
-            <a:noFill/>
-          </a:ln>
-        </p:spPr>
-        <p:style>
-          <a:lnRef idx="1">
-            <a:schemeClr val="accent1"/>
-          </a:lnRef>
-          <a:fillRef idx="3">
-            <a:schemeClr val="accent1"/>
-          </a:fillRef>
-          <a:effectRef idx="2">
-            <a:schemeClr val="accent1"/>
-          </a:effectRef>
-          <a:fontRef idx="minor">
-            <a:schemeClr val="lt1"/>
-          </a:fontRef>
-        </p:style>
-        <p:txBody>
-          <a:bodyPr rtlCol="0" anchor="ctr"/>
-          <a:lstStyle/>
-          <a:p>
-            <a:pPr algn="ctr"/>
-          </a:p>
-        </p:txBody>
-      </p:sp>
-      <p:sp>
-        <p:nvSpPr>
-          <p:cNvPr id="14" name="TextBox 13"/>
-          <p:cNvSpPr txBox="1"/>
-          <p:nvPr/>
-        </p:nvSpPr>
-        <p:spPr>
-          <a:xfrm>
-            <a:off x="6359652" y="2560320"/>
-            <a:ext cx="5335524" cy="256032"/>
-          </a:xfrm>
-          <a:prstGeom prst="rect">
-            <a:avLst/>
-          </a:prstGeom>
-          <a:noFill/>
-        </p:spPr>
-        <p:txBody>
-          <a:bodyPr wrap="square">
-            <a:spAutoFit/>
-          </a:bodyPr>
-          <a:lstStyle/>
-          <a:p>
-            <a:pPr algn="l"/>
-            <a:r>
-              <a:rPr sz="1200" b="1" i="0">
-                <a:solidFill>
-                  <a:srgbClr val="1A1A1A"/>
-                </a:solidFill>
-                <a:latin typeface="Calibri"/>
-              </a:rPr>
-              <a:t>Alstom (+Bombardier)</a:t>
-            </a:r>
-          </a:p>
-        </p:txBody>
-      </p:sp>
-      <p:sp>
-        <p:nvSpPr>
-          <p:cNvPr id="15" name="TextBox 14"/>
-          <p:cNvSpPr txBox="1"/>
-          <p:nvPr/>
-        </p:nvSpPr>
-        <p:spPr>
-          <a:xfrm>
-            <a:off x="6359652" y="2798064"/>
-            <a:ext cx="5335524" cy="201168"/>
-          </a:xfrm>
-          <a:prstGeom prst="rect">
-            <a:avLst/>
-          </a:prstGeom>
-          <a:noFill/>
-        </p:spPr>
-        <p:txBody>
-          <a:bodyPr wrap="square">
-            <a:spAutoFit/>
-          </a:bodyPr>
-          <a:lstStyle/>
-          <a:p>
-            <a:pPr algn="l"/>
-            <a:r>
-              <a:rPr sz="1000" b="0" i="0">
-                <a:solidFill>
-                  <a:srgbClr val="1A1A1A"/>
-                </a:solidFill>
-                <a:latin typeface="Calibri"/>
-              </a:rPr>
-              <a:t>Breites Signaling-Portfolio, CBTC-Stärke</a:t>
-            </a:r>
-          </a:p>
-        </p:txBody>
-      </p:sp>
-      <p:sp>
-        <p:nvSpPr>
-          <p:cNvPr id="16" name="Rectangle 15"/>
-          <p:cNvSpPr/>
-          <p:nvPr/>
-        </p:nvSpPr>
-        <p:spPr>
-          <a:xfrm>
-            <a:off x="6231636" y="3410712"/>
-            <a:ext cx="73152" cy="804672"/>
-          </a:xfrm>
-          <a:prstGeom prst="rect">
-            <a:avLst/>
-          </a:prstGeom>
-          <a:solidFill>
-            <a:srgbClr val="A8A8A8"/>
-          </a:solidFill>
-          <a:ln>
-            <a:noFill/>
-          </a:ln>
-        </p:spPr>
-        <p:style>
-          <a:lnRef idx="1">
-            <a:schemeClr val="accent1"/>
-          </a:lnRef>
-          <a:fillRef idx="3">
-            <a:schemeClr val="accent1"/>
-          </a:fillRef>
-          <a:effectRef idx="2">
-            <a:schemeClr val="accent1"/>
-          </a:effectRef>
-          <a:fontRef idx="minor">
-            <a:schemeClr val="lt1"/>
-          </a:fontRef>
-        </p:style>
-        <p:txBody>
-          <a:bodyPr rtlCol="0" anchor="ctr"/>
-          <a:lstStyle/>
-          <a:p>
-            <a:pPr algn="ctr"/>
-          </a:p>
-        </p:txBody>
-      </p:sp>
-      <p:sp>
-        <p:nvSpPr>
-          <p:cNvPr id="17" name="TextBox 16"/>
-          <p:cNvSpPr txBox="1"/>
-          <p:nvPr/>
-        </p:nvSpPr>
-        <p:spPr>
-          <a:xfrm>
-            <a:off x="6359652" y="3410712"/>
-            <a:ext cx="5335524" cy="256032"/>
-          </a:xfrm>
-          <a:prstGeom prst="rect">
-            <a:avLst/>
-          </a:prstGeom>
-          <a:noFill/>
-        </p:spPr>
-        <p:txBody>
-          <a:bodyPr wrap="square">
-            <a:spAutoFit/>
-          </a:bodyPr>
-          <a:lstStyle/>
-          <a:p>
-            <a:pPr algn="l"/>
-            <a:r>
-              <a:rPr sz="1200" b="1" i="0">
-                <a:solidFill>
-                  <a:srgbClr val="1A1A1A"/>
-                </a:solidFill>
-                <a:latin typeface="Calibri"/>
-              </a:rPr>
-              <a:t>Hitachi Rail</a:t>
-            </a:r>
-          </a:p>
-        </p:txBody>
-      </p:sp>
-      <p:sp>
-        <p:nvSpPr>
-          <p:cNvPr id="18" name="TextBox 17"/>
-          <p:cNvSpPr txBox="1"/>
-          <p:nvPr/>
-        </p:nvSpPr>
-        <p:spPr>
-          <a:xfrm>
-            <a:off x="6359652" y="3648456"/>
-            <a:ext cx="5335524" cy="201168"/>
-          </a:xfrm>
-          <a:prstGeom prst="rect">
-            <a:avLst/>
-          </a:prstGeom>
-          <a:noFill/>
-        </p:spPr>
-        <p:txBody>
-          <a:bodyPr wrap="square">
-            <a:spAutoFit/>
-          </a:bodyPr>
-          <a:lstStyle/>
-          <a:p>
-            <a:pPr algn="l"/>
-            <a:r>
-              <a:rPr sz="1000" b="0" i="0">
-                <a:solidFill>
-                  <a:srgbClr val="1A1A1A"/>
-                </a:solidFill>
-                <a:latin typeface="Calibri"/>
-              </a:rPr>
-              <a:t>Systemintegration, Europa &amp; Asien</a:t>
-            </a:r>
-          </a:p>
-        </p:txBody>
-      </p:sp>
-      <p:sp>
-        <p:nvSpPr>
-          <p:cNvPr id="19" name="Rectangle 18"/>
-          <p:cNvSpPr/>
-          <p:nvPr/>
-        </p:nvSpPr>
-        <p:spPr>
-          <a:xfrm>
-            <a:off x="6231636" y="4261104"/>
-            <a:ext cx="73152" cy="804672"/>
-          </a:xfrm>
-          <a:prstGeom prst="rect">
-            <a:avLst/>
-          </a:prstGeom>
-          <a:solidFill>
-            <a:srgbClr val="A8A8A8"/>
-          </a:solidFill>
-          <a:ln>
-            <a:noFill/>
-          </a:ln>
-        </p:spPr>
-        <p:style>
-          <a:lnRef idx="1">
-            <a:schemeClr val="accent1"/>
-          </a:lnRef>
-          <a:fillRef idx="3">
-            <a:schemeClr val="accent1"/>
-          </a:fillRef>
-          <a:effectRef idx="2">
-            <a:schemeClr val="accent1"/>
-          </a:effectRef>
-          <a:fontRef idx="minor">
-            <a:schemeClr val="lt1"/>
-          </a:fontRef>
-        </p:style>
-        <p:txBody>
-          <a:bodyPr rtlCol="0" anchor="ctr"/>
-          <a:lstStyle/>
-          <a:p>
-            <a:pPr algn="ctr"/>
-          </a:p>
-        </p:txBody>
-      </p:sp>
-      <p:sp>
-        <p:nvSpPr>
-          <p:cNvPr id="20" name="TextBox 19"/>
-          <p:cNvSpPr txBox="1"/>
-          <p:nvPr/>
-        </p:nvSpPr>
-        <p:spPr>
-          <a:xfrm>
-            <a:off x="6359652" y="4261104"/>
-            <a:ext cx="5335524" cy="256032"/>
-          </a:xfrm>
-          <a:prstGeom prst="rect">
-            <a:avLst/>
-          </a:prstGeom>
-          <a:noFill/>
-        </p:spPr>
-        <p:txBody>
-          <a:bodyPr wrap="square">
-            <a:spAutoFit/>
-          </a:bodyPr>
-          <a:lstStyle/>
-          <a:p>
-            <a:pPr algn="l"/>
-            <a:r>
-              <a:rPr sz="1200" b="1" i="0">
-                <a:solidFill>
-                  <a:srgbClr val="1A1A1A"/>
-                </a:solidFill>
-                <a:latin typeface="Calibri"/>
-              </a:rPr>
-              <a:t>Vossloh / Hanning &amp; Kahl</a:t>
-            </a:r>
-          </a:p>
-        </p:txBody>
-      </p:sp>
-      <p:sp>
-        <p:nvSpPr>
-          <p:cNvPr id="21" name="TextBox 20"/>
-          <p:cNvSpPr txBox="1"/>
-          <p:nvPr/>
-        </p:nvSpPr>
-        <p:spPr>
-          <a:xfrm>
-            <a:off x="6359652" y="4498848"/>
-            <a:ext cx="5335524" cy="201168"/>
-          </a:xfrm>
-          <a:prstGeom prst="rect">
-            <a:avLst/>
-          </a:prstGeom>
-          <a:noFill/>
-        </p:spPr>
-        <p:txBody>
-          <a:bodyPr wrap="square">
-            <a:spAutoFit/>
-          </a:bodyPr>
-          <a:lstStyle/>
-          <a:p>
-            <a:pPr algn="l"/>
-            <a:r>
-              <a:rPr sz="1000" b="0" i="0">
-                <a:solidFill>
-                  <a:srgbClr val="1A1A1A"/>
-                </a:solidFill>
-                <a:latin typeface="Calibri"/>
-              </a:rPr>
-              <a:t>Nischenspezialisten, hohe Qualität</a:t>
-            </a:r>
-          </a:p>
-        </p:txBody>
-      </p:sp>
-      <p:sp>
-        <p:nvSpPr>
-          <p:cNvPr id="22" name="Rectangle 21"/>
-          <p:cNvSpPr/>
-          <p:nvPr/>
-        </p:nvSpPr>
-        <p:spPr>
-          <a:xfrm>
-            <a:off x="6231636" y="5111496"/>
-            <a:ext cx="73152" cy="804672"/>
-          </a:xfrm>
-          <a:prstGeom prst="rect">
-            <a:avLst/>
-          </a:prstGeom>
-          <a:solidFill>
-            <a:srgbClr val="A8A8A8"/>
-          </a:solidFill>
-          <a:ln>
-            <a:noFill/>
-          </a:ln>
-        </p:spPr>
-        <p:style>
-          <a:lnRef idx="1">
-            <a:schemeClr val="accent1"/>
-          </a:lnRef>
-          <a:fillRef idx="3">
-            <a:schemeClr val="accent1"/>
-          </a:fillRef>
-          <a:effectRef idx="2">
-            <a:schemeClr val="accent1"/>
-          </a:effectRef>
-          <a:fontRef idx="minor">
-            <a:schemeClr val="lt1"/>
-          </a:fontRef>
-        </p:style>
-        <p:txBody>
-          <a:bodyPr rtlCol="0" anchor="ctr"/>
-          <a:lstStyle/>
-          <a:p>
-            <a:pPr algn="ctr"/>
-          </a:p>
-        </p:txBody>
-      </p:sp>
-      <p:sp>
-        <p:nvSpPr>
-          <p:cNvPr id="23" name="TextBox 22"/>
-          <p:cNvSpPr txBox="1"/>
-          <p:nvPr/>
-        </p:nvSpPr>
-        <p:spPr>
-          <a:xfrm>
-            <a:off x="6359652" y="5111496"/>
-            <a:ext cx="5335524" cy="256032"/>
-          </a:xfrm>
-          <a:prstGeom prst="rect">
-            <a:avLst/>
-          </a:prstGeom>
-          <a:noFill/>
-        </p:spPr>
-        <p:txBody>
-          <a:bodyPr wrap="square">
-            <a:spAutoFit/>
-          </a:bodyPr>
-          <a:lstStyle/>
-          <a:p>
-            <a:pPr algn="l"/>
-            <a:r>
-              <a:rPr sz="1200" b="1" i="0">
-                <a:solidFill>
-                  <a:srgbClr val="1A1A1A"/>
-                </a:solidFill>
-                <a:latin typeface="Calibri"/>
-              </a:rPr>
-              <a:t>CRRC / CASCO</a:t>
-            </a:r>
-          </a:p>
-        </p:txBody>
-      </p:sp>
-      <p:sp>
-        <p:nvSpPr>
-          <p:cNvPr id="24" name="TextBox 23"/>
-          <p:cNvSpPr txBox="1"/>
-          <p:nvPr/>
-        </p:nvSpPr>
-        <p:spPr>
-          <a:xfrm>
-            <a:off x="6359652" y="5349240"/>
-            <a:ext cx="5335524" cy="201168"/>
-          </a:xfrm>
-          <a:prstGeom prst="rect">
-            <a:avLst/>
-          </a:prstGeom>
-          <a:noFill/>
-        </p:spPr>
-        <p:txBody>
-          <a:bodyPr wrap="square">
-            <a:spAutoFit/>
-          </a:bodyPr>
-          <a:lstStyle/>
-          <a:p>
-            <a:pPr algn="l"/>
-            <a:r>
-              <a:rPr sz="1000" b="0" i="0">
-                <a:solidFill>
-                  <a:srgbClr val="1A1A1A"/>
-                </a:solidFill>
-                <a:latin typeface="Calibri"/>
-              </a:rPr>
-              <a:t>Preiswettbewerb, wachsender Europa-Export</a:t>
-            </a:r>
-          </a:p>
-        </p:txBody>
-      </p:sp>
-      <p:sp>
-        <p:nvSpPr>
-          <p:cNvPr id="25" name="Rectangle 24"/>
-          <p:cNvSpPr/>
-          <p:nvPr/>
-        </p:nvSpPr>
-        <p:spPr>
-          <a:xfrm>
-            <a:off x="457200" y="5989320"/>
-            <a:ext cx="11274552" cy="329184"/>
+            <a:off x="411480" y="6089904"/>
+            <a:ext cx="11365992" cy="347472"/>
           </a:xfrm>
           <a:prstGeom prst="rect">
             <a:avLst/>
@@ -5070,14 +4190,14 @@
       </p:sp>
       <p:sp>
         <p:nvSpPr>
-          <p:cNvPr id="26" name="TextBox 25"/>
+          <p:cNvPr id="11" name="TextBox 10"/>
           <p:cNvSpPr txBox="1"/>
           <p:nvPr/>
         </p:nvSpPr>
         <p:spPr>
           <a:xfrm>
-            <a:off x="548640" y="6016752"/>
-            <a:ext cx="11091672" cy="292608"/>
+            <a:off x="521208" y="6126480"/>
+            <a:ext cx="11146536" cy="292608"/>
           </a:xfrm>
           <a:prstGeom prst="rect">
             <a:avLst/>
@@ -5092,20 +4212,20 @@
           <a:p>
             <a:pPr algn="l"/>
             <a:r>
-              <a:rPr sz="1000" b="1" i="0">
+              <a:rPr sz="950" b="1" i="0">
                 <a:solidFill>
                   <a:srgbClr val="FFFFFF"/>
                 </a:solidFill>
                 <a:latin typeface="Calibri"/>
               </a:rPr>
-              <a:t>Implikation für Siemens:  Premium-Positionierung + Software/Service-Anteil erhöhen – Wachstumshebel in Europa durch Deutschlandtakt &amp; TEN-T-Investitionen.</a:t>
-            </a:r>
-          </a:p>
-        </p:txBody>
-      </p:sp>
-      <p:sp>
-        <p:nvSpPr>
-          <p:cNvPr id="27" name="Rectangle 26"/>
+              <a:t>Implikation für Siemens:  Premium-Positionierung + Software/Service-Anteil erhöhen – Wachstumshebel in Europa durch Deutschlandtakt &amp; TEN-T-Investitionen nutzen.</a:t>
+            </a:r>
+          </a:p>
+        </p:txBody>
+      </p:sp>
+      <p:sp>
+        <p:nvSpPr>
+          <p:cNvPr id="12" name="Rectangle 11"/>
           <p:cNvSpPr/>
           <p:nvPr/>
         </p:nvSpPr>
@@ -5148,14 +4268,14 @@
       </p:sp>
       <p:sp>
         <p:nvSpPr>
-          <p:cNvPr id="28" name="TextBox 27"/>
+          <p:cNvPr id="13" name="TextBox 12"/>
           <p:cNvSpPr txBox="1"/>
           <p:nvPr/>
         </p:nvSpPr>
         <p:spPr>
           <a:xfrm>
-            <a:off x="457200" y="6510528"/>
-            <a:ext cx="11274552" cy="329184"/>
+            <a:off x="411480" y="6528816"/>
+            <a:ext cx="11365992" cy="310896"/>
           </a:xfrm>
           <a:prstGeom prst="rect">
             <a:avLst/>
@@ -5170,13 +4290,13 @@
           <a:p>
             <a:pPr algn="l"/>
             <a:r>
-              <a:rPr sz="900" b="0" i="0">
+              <a:rPr sz="800" b="0" i="0">
                 <a:solidFill>
                   <a:srgbClr val="FFFFFF"/>
                 </a:solidFill>
                 <a:latin typeface="Calibri"/>
               </a:rPr>
-              <a:t>Quellen: Siemens Mobility GB 2024 | Alstom AR 2024 | Hitachi Rail AR 2024 | Mordor Intelligence Rail Signaling Market Summary 2024 | Eigene Schätzung</a:t>
+              <a:t>Quellen: Siemens Mobility GB 2024 | Alstom AR 2024 | Hitachi Rail AR 2024 | Mordor Intelligence Rail Signaling Market 2024 | Eigene Schätzung</a:t>
             </a:r>
           </a:p>
         </p:txBody>
